--- a/docs/paper/diagram-sources-2026-09-16/fig3_manufacturing.pptx
+++ b/docs/paper/diagram-sources-2026-09-16/fig3_manufacturing.pptx
@@ -4120,8 +4120,8 @@
         </p:nvSpPr>
         <p:spPr>
           <a:xfrm>
-            <a:off x="5423909" y="152742"/>
-            <a:ext cx="984084" cy="219702"/>
+            <a:off x="5374705" y="152742"/>
+            <a:ext cx="1082492" cy="219702"/>
           </a:xfrm>
           <a:prstGeom prst="rect">
             <a:avLst/>
@@ -4156,7 +4156,7 @@
                 <a:ea typeface="Arial"/>
                 <a:cs typeface="Arial"/>
               </a:rPr>
-              <a:t>Dry output</a:t>
+              <a:t>Dry product</a:t>
             </a:r>
           </a:p>
         </p:txBody>
